--- a/media/resources/files/Ekvivalenettuuluk_Onduktardan_menen_Bolchoktor-3Tutashtyr_ZpC7ATF.pptx
+++ b/media/resources/files/Ekvivalenettuuluk_Onduktardan_menen_Bolchoktor-3Tutashtyr_ZpC7ATF.pptx
@@ -7343,7 +7343,7 @@
                 <a:ea typeface="+mn-ea"/>
                 <a:cs typeface="+mn-cs"/>
               </a:rPr>
-              <a:t>Ошол команда үчүн квадратты талап кылуу үчүн жооп кутучасынын тиешелүү көлөкө тарабын чыкылдатыңыз/тийиңиз.</a:t>
+              <a:t>Ошол команданын квадратын ээлөө үчүн жооп кутучасынын боёлгон бөлүгүн басыңыз.</a:t>
             </a:r>
           </a:p>
           <a:p>
@@ -11120,7 +11120,7 @@
                           <a:latin typeface="Arial" panose="020B0604020202020204" pitchFamily="34" charset="0"/>
                           <a:cs typeface="Arial" panose="020B0604020202020204" pitchFamily="34" charset="0"/>
                         </a:rPr>
-                        <a:t>0.01</a:t>
+                        <a:t>0,01</a:t>
                       </a:r>
                     </a:p>
                   </a:txBody>
@@ -11177,7 +11177,7 @@
                           <a:latin typeface="Arial" panose="020B0604020202020204" pitchFamily="34" charset="0"/>
                           <a:cs typeface="Arial" panose="020B0604020202020204" pitchFamily="34" charset="0"/>
                         </a:rPr>
-                        <a:t>0.4</a:t>
+                        <a:t>0,4</a:t>
                       </a:r>
                     </a:p>
                   </a:txBody>
@@ -11241,7 +11241,7 @@
                           <a:latin typeface="Arial" panose="020B0604020202020204" pitchFamily="34" charset="0"/>
                           <a:cs typeface="Arial" panose="020B0604020202020204" pitchFamily="34" charset="0"/>
                         </a:rPr>
-                        <a:t>0.7</a:t>
+                        <a:t>0,7</a:t>
                       </a:r>
                     </a:p>
                   </a:txBody>
@@ -11298,7 +11298,7 @@
                           <a:latin typeface="Arial" panose="020B0604020202020204" pitchFamily="34" charset="0"/>
                           <a:cs typeface="Arial" panose="020B0604020202020204" pitchFamily="34" charset="0"/>
                         </a:rPr>
-                        <a:t>0.2</a:t>
+                        <a:t>0,2</a:t>
                       </a:r>
                     </a:p>
                   </a:txBody>
@@ -11362,7 +11362,7 @@
                           <a:latin typeface="Arial" panose="020B0604020202020204" pitchFamily="34" charset="0"/>
                           <a:cs typeface="Arial" panose="020B0604020202020204" pitchFamily="34" charset="0"/>
                         </a:rPr>
-                        <a:t>0.9</a:t>
+                        <a:t>0,9</a:t>
                       </a:r>
                     </a:p>
                   </a:txBody>
@@ -11419,7 +11419,7 @@
                           <a:latin typeface="Arial" panose="020B0604020202020204" pitchFamily="34" charset="0"/>
                           <a:cs typeface="Arial" panose="020B0604020202020204" pitchFamily="34" charset="0"/>
                         </a:rPr>
-                        <a:t>0.15</a:t>
+                        <a:t>0,15</a:t>
                       </a:r>
                     </a:p>
                   </a:txBody>
@@ -11483,7 +11483,7 @@
                           <a:latin typeface="Arial" panose="020B0604020202020204" pitchFamily="34" charset="0"/>
                           <a:cs typeface="Arial" panose="020B0604020202020204" pitchFamily="34" charset="0"/>
                         </a:rPr>
-                        <a:t>0.1</a:t>
+                        <a:t>0,1</a:t>
                       </a:r>
                     </a:p>
                   </a:txBody>
@@ -11540,7 +11540,7 @@
                           <a:latin typeface="Arial" panose="020B0604020202020204" pitchFamily="34" charset="0"/>
                           <a:cs typeface="Arial" panose="020B0604020202020204" pitchFamily="34" charset="0"/>
                         </a:rPr>
-                        <a:t>0.6</a:t>
+                        <a:t>0,6</a:t>
                       </a:r>
                     </a:p>
                   </a:txBody>
@@ -11604,7 +11604,7 @@
                           <a:latin typeface="Arial" panose="020B0604020202020204" pitchFamily="34" charset="0"/>
                           <a:cs typeface="Arial" panose="020B0604020202020204" pitchFamily="34" charset="0"/>
                         </a:rPr>
-                        <a:t>0.67</a:t>
+                        <a:t>0,67</a:t>
                       </a:r>
                     </a:p>
                   </a:txBody>
@@ -11661,7 +11661,7 @@
                           <a:latin typeface="Arial" panose="020B0604020202020204" pitchFamily="34" charset="0"/>
                           <a:cs typeface="Arial" panose="020B0604020202020204" pitchFamily="34" charset="0"/>
                         </a:rPr>
-                        <a:t>0.03</a:t>
+                        <a:t>0,03</a:t>
                       </a:r>
                     </a:p>
                   </a:txBody>
@@ -11725,7 +11725,7 @@
                           <a:latin typeface="Arial" panose="020B0604020202020204" pitchFamily="34" charset="0"/>
                           <a:cs typeface="Arial" panose="020B0604020202020204" pitchFamily="34" charset="0"/>
                         </a:rPr>
-                        <a:t>0.14</a:t>
+                        <a:t>0,14</a:t>
                       </a:r>
                     </a:p>
                   </a:txBody>
@@ -11782,7 +11782,7 @@
                           <a:latin typeface="Arial" panose="020B0604020202020204" pitchFamily="34" charset="0"/>
                           <a:cs typeface="Arial" panose="020B0604020202020204" pitchFamily="34" charset="0"/>
                         </a:rPr>
-                        <a:t>0.99</a:t>
+                        <a:t>0,99</a:t>
                       </a:r>
                     </a:p>
                   </a:txBody>
@@ -11846,7 +11846,7 @@
                           <a:latin typeface="Arial" panose="020B0604020202020204" pitchFamily="34" charset="0"/>
                           <a:cs typeface="Arial" panose="020B0604020202020204" pitchFamily="34" charset="0"/>
                         </a:rPr>
-                        <a:t>0.25</a:t>
+                        <a:t>0,25</a:t>
                       </a:r>
                     </a:p>
                   </a:txBody>
@@ -11903,7 +11903,7 @@
                           <a:latin typeface="Arial" panose="020B0604020202020204" pitchFamily="34" charset="0"/>
                           <a:cs typeface="Arial" panose="020B0604020202020204" pitchFamily="34" charset="0"/>
                         </a:rPr>
-                        <a:t>0.3</a:t>
+                        <a:t>0,3</a:t>
                       </a:r>
                     </a:p>
                   </a:txBody>
@@ -11967,7 +11967,7 @@
                           <a:latin typeface="Arial" panose="020B0604020202020204" pitchFamily="34" charset="0"/>
                           <a:cs typeface="Arial" panose="020B0604020202020204" pitchFamily="34" charset="0"/>
                         </a:rPr>
-                        <a:t>0.5</a:t>
+                        <a:t>0,5</a:t>
                       </a:r>
                     </a:p>
                   </a:txBody>
@@ -12024,7 +12024,7 @@
                           <a:latin typeface="Arial" panose="020B0604020202020204" pitchFamily="34" charset="0"/>
                           <a:cs typeface="Arial" panose="020B0604020202020204" pitchFamily="34" charset="0"/>
                         </a:rPr>
-                        <a:t>0.8</a:t>
+                        <a:t>0,8</a:t>
                       </a:r>
                     </a:p>
                   </a:txBody>
@@ -25867,7 +25867,7 @@
                           <a:latin typeface="Arial" panose="020B0604020202020204" pitchFamily="34" charset="0"/>
                           <a:cs typeface="Arial" panose="020B0604020202020204" pitchFamily="34" charset="0"/>
                         </a:rPr>
-                        <a:t>0.15</a:t>
+                        <a:t>0,15</a:t>
                       </a:r>
                     </a:p>
                   </a:txBody>
@@ -25940,7 +25940,7 @@
                           <a:latin typeface="Arial" panose="020B0604020202020204" pitchFamily="34" charset="0"/>
                           <a:cs typeface="Arial" panose="020B0604020202020204" pitchFamily="34" charset="0"/>
                         </a:rPr>
-                        <a:t>0.25</a:t>
+                        <a:t>0,25</a:t>
                       </a:r>
                     </a:p>
                   </a:txBody>
@@ -26004,7 +26004,7 @@
                           <a:latin typeface="Arial" panose="020B0604020202020204" pitchFamily="34" charset="0"/>
                           <a:cs typeface="Arial" panose="020B0604020202020204" pitchFamily="34" charset="0"/>
                         </a:rPr>
-                        <a:t>0.35</a:t>
+                        <a:t>0,35</a:t>
                       </a:r>
                     </a:p>
                   </a:txBody>
@@ -26077,7 +26077,7 @@
                           <a:latin typeface="Arial" panose="020B0604020202020204" pitchFamily="34" charset="0"/>
                           <a:cs typeface="Arial" panose="020B0604020202020204" pitchFamily="34" charset="0"/>
                         </a:rPr>
-                        <a:t>0.65</a:t>
+                        <a:t>0,65</a:t>
                       </a:r>
                     </a:p>
                   </a:txBody>
@@ -26141,7 +26141,7 @@
                           <a:latin typeface="Arial" panose="020B0604020202020204" pitchFamily="34" charset="0"/>
                           <a:cs typeface="Arial" panose="020B0604020202020204" pitchFamily="34" charset="0"/>
                         </a:rPr>
-                        <a:t>0.95</a:t>
+                        <a:t>0,95</a:t>
                       </a:r>
                     </a:p>
                   </a:txBody>
@@ -26214,7 +26214,7 @@
                           <a:latin typeface="Arial" panose="020B0604020202020204" pitchFamily="34" charset="0"/>
                           <a:cs typeface="Arial" panose="020B0604020202020204" pitchFamily="34" charset="0"/>
                         </a:rPr>
-                        <a:t>0.46</a:t>
+                        <a:t>0,46</a:t>
                       </a:r>
                     </a:p>
                   </a:txBody>
@@ -26278,7 +26278,7 @@
                           <a:latin typeface="Arial" panose="020B0604020202020204" pitchFamily="34" charset="0"/>
                           <a:cs typeface="Arial" panose="020B0604020202020204" pitchFamily="34" charset="0"/>
                         </a:rPr>
-                        <a:t>0.14</a:t>
+                        <a:t>0,14</a:t>
                       </a:r>
                     </a:p>
                   </a:txBody>
@@ -26351,7 +26351,7 @@
                           <a:latin typeface="Arial" panose="020B0604020202020204" pitchFamily="34" charset="0"/>
                           <a:cs typeface="Arial" panose="020B0604020202020204" pitchFamily="34" charset="0"/>
                         </a:rPr>
-                        <a:t>0.45</a:t>
+                        <a:t>0,45</a:t>
                       </a:r>
                     </a:p>
                   </a:txBody>
@@ -26415,7 +26415,7 @@
                           <a:latin typeface="Arial" panose="020B0604020202020204" pitchFamily="34" charset="0"/>
                           <a:cs typeface="Arial" panose="020B0604020202020204" pitchFamily="34" charset="0"/>
                         </a:rPr>
-                        <a:t>0.55</a:t>
+                        <a:t>0,55</a:t>
                       </a:r>
                     </a:p>
                   </a:txBody>
@@ -26488,7 +26488,7 @@
                           <a:latin typeface="Arial" panose="020B0604020202020204" pitchFamily="34" charset="0"/>
                           <a:cs typeface="Arial" panose="020B0604020202020204" pitchFamily="34" charset="0"/>
                         </a:rPr>
-                        <a:t>0.85</a:t>
+                        <a:t>0,85</a:t>
                       </a:r>
                     </a:p>
                   </a:txBody>
@@ -26552,7 +26552,7 @@
                           <a:latin typeface="Arial" panose="020B0604020202020204" pitchFamily="34" charset="0"/>
                           <a:cs typeface="Arial" panose="020B0604020202020204" pitchFamily="34" charset="0"/>
                         </a:rPr>
-                        <a:t>0.75</a:t>
+                        <a:t>0,75</a:t>
                       </a:r>
                     </a:p>
                   </a:txBody>
@@ -26625,7 +26625,7 @@
                           <a:latin typeface="Arial" panose="020B0604020202020204" pitchFamily="34" charset="0"/>
                           <a:cs typeface="Arial" panose="020B0604020202020204" pitchFamily="34" charset="0"/>
                         </a:rPr>
-                        <a:t>0.22</a:t>
+                        <a:t>0,22</a:t>
                       </a:r>
                     </a:p>
                   </a:txBody>
@@ -26689,7 +26689,7 @@
                           <a:latin typeface="Arial" panose="020B0604020202020204" pitchFamily="34" charset="0"/>
                           <a:cs typeface="Arial" panose="020B0604020202020204" pitchFamily="34" charset="0"/>
                         </a:rPr>
-                        <a:t>0.98</a:t>
+                        <a:t>0,98</a:t>
                       </a:r>
                     </a:p>
                   </a:txBody>
@@ -26762,7 +26762,7 @@
                           <a:latin typeface="Arial" panose="020B0604020202020204" pitchFamily="34" charset="0"/>
                           <a:cs typeface="Arial" panose="020B0604020202020204" pitchFamily="34" charset="0"/>
                         </a:rPr>
-                        <a:t>0.05</a:t>
+                        <a:t>0,05</a:t>
                       </a:r>
                     </a:p>
                   </a:txBody>
@@ -26826,7 +26826,7 @@
                           <a:latin typeface="Arial" panose="020B0604020202020204" pitchFamily="34" charset="0"/>
                           <a:cs typeface="Arial" panose="020B0604020202020204" pitchFamily="34" charset="0"/>
                         </a:rPr>
-                        <a:t>0.03</a:t>
+                        <a:t>0,03</a:t>
                       </a:r>
                     </a:p>
                   </a:txBody>
@@ -26899,7 +26899,7 @@
                           <a:latin typeface="Arial" panose="020B0604020202020204" pitchFamily="34" charset="0"/>
                           <a:cs typeface="Arial" panose="020B0604020202020204" pitchFamily="34" charset="0"/>
                         </a:rPr>
-                        <a:t>0.66</a:t>
+                        <a:t>0,66</a:t>
                       </a:r>
                     </a:p>
                   </a:txBody>
